--- a/generated/sources/reports/board/Q3_2026_Trading_Update_BoD_draft_v5.pptx
+++ b/generated/sources/reports/board/Q3_2026_Trading_Update_BoD_draft_v5.pptx
@@ -3353,7 +3353,7 @@
                 </a:solidFill>
                 <a:latin typeface="Cambria"/>
               </a:rPr>
-              <a:t>MONCLER</a:t>
+              <a:t>VALENTINO</a:t>
             </a:r>
           </a:p>
         </p:txBody>
@@ -4056,7 +4056,7 @@
                 </a:solidFill>
                 <a:latin typeface="Calibri"/>
               </a:rPr>
-              <a:t>• FW26 new-in well received; Genius POLARIS a success in China. FW26 US/UK campaign delivered +22% attributed sales uplift.</a:t>
+              <a:t>• FW26 new-in well received; Couture ASTRA a success in China. FW26 US/UK campaign delivered +22% attributed sales uplift.</a:t>
             </a:r>
           </a:p>
           <a:p>
@@ -4072,7 +4072,7 @@
                 </a:solidFill>
                 <a:latin typeface="Calibri"/>
               </a:rPr>
-              <a:t>• Watch-outs: TIB vest quality issue (slider), stock-outs on hero items (MAIRE black, ILVARO pink), Rome store works.</a:t>
+              <a:t>• Watch-outs: VEL vest quality issue (slider), stock-outs on hero items (AUREA black, IRIDIA pink), Rome store works.</a:t>
             </a:r>
           </a:p>
         </p:txBody>
@@ -5623,7 +5623,7 @@
                 </a:solidFill>
                 <a:latin typeface="Calibri"/>
               </a:rPr>
-              <a:t>ILVARO powder pink: celebrity-driven sell-out in Asia; re-order under evaluation.</a:t>
+              <a:t>IRIDIA powder pink: celebrity-driven sell-out in Asia; re-order under evaluation.</a:t>
             </a:r>
           </a:p>
         </p:txBody>
@@ -5678,7 +5678,7 @@
                 </a:solidFill>
                 <a:latin typeface="Calibri"/>
               </a:rPr>
-              <a:t>TIB vest slider defect: potential stop-sale of July batch; provision under assessment (€1-2m).</a:t>
+              <a:t>VEL vest slider defect: potential stop-sale of July batch; provision under assessment (€1-2m).</a:t>
             </a:r>
           </a:p>
           <a:p>
@@ -5694,7 +5694,7 @@
                 </a:solidFill>
                 <a:latin typeface="Calibri"/>
               </a:rPr>
-              <a:t>Stock availability on hero items (MAIRE black DC re-supply only from 16/10).</a:t>
+              <a:t>Stock availability on hero items (AUREA black DC re-supply only from 16/10).</a:t>
             </a:r>
           </a:p>
           <a:p>
